--- a/cursos/recursos/el-mapa-de-los-finales/23-mate-de-alfil-y-caballo-y-torre-y-alfil-contra-torre.pptx
+++ b/cursos/recursos/el-mapa-de-los-finales/23-mate-de-alfil-y-caballo-y-torre-y-alfil-contra-torre.pptx
@@ -7505,7 +7505,7 @@
                 </a:solidFill>
                 <a:latin typeface="Calibri"/>
               </a:rPr>
-              <a:t>•  Recorré cada línea principal hasta entender el porqué de cada jugada.</a:t>
+              <a:t>•  Recorre cada línea principal hasta entender el porqué de cada jugada.</a:t>
             </a:r>
           </a:p>
           <a:p>
@@ -7521,7 +7521,7 @@
                 </a:solidFill>
                 <a:latin typeface="Calibri"/>
               </a:rPr>
-              <a:t>•  Practicá primero las posiciones clave, después las demás.</a:t>
+              <a:t>•  Practica primero las posiciones clave, después las demás.</a:t>
             </a:r>
           </a:p>
           <a:p>
@@ -7537,7 +7537,7 @@
                 </a:solidFill>
                 <a:latin typeface="Calibri"/>
               </a:rPr>
-              <a:t>•  Anotá las reglas de cada final con tus palabras.</a:t>
+              <a:t>•  Anota las reglas de cada final con tus palabras.</a:t>
             </a:r>
           </a:p>
         </p:txBody>
